--- a/slides/Toni Bertólez-Martínez, et al. (2026).pptx
+++ b/slides/Toni Bertólez-Martínez, et al. (2026).pptx
@@ -16,6 +16,9 @@
     <p:sldId id="264" r:id="rId15"/>
     <p:sldId id="265" r:id="rId16"/>
     <p:sldId id="266" r:id="rId17"/>
+    <p:sldId id="267" r:id="rId18"/>
+    <p:sldId id="268" r:id="rId19"/>
+    <p:sldId id="269" r:id="rId20"/>
   </p:sldIdLst>
   <p:sldSz cx="12192000" cy="6858000"/>
   <p:notesSz cx="6858000" cy="9144000"/>
@@ -528,17 +531,32 @@
           <a:lstStyle/>
           <a:p>
             <a:r>
-              <a:t>introduction の内容。</a:t>
-            </a:r>
-          </a:p>
-          <a:p>
-            <a:r>
-              <a:t>パルサー説への反論は3つ: 銀河の内側でパルサーがほとんど見つかっていない / パルサーのもとになる X 線連星が少なく、超過の 4–11% しか説明できない / パルサーは生まれたときに飛ばされて広がるはずなのに、超過は中心に集中しすぎている。</a:t>
-            </a:r>
-          </a:p>
-          <a:p>
-            <a:r>
-              <a:t>注意: これは GCE (35–65 GeV の WIMP) の話。僕の卒論の Totani の 20 GeV ハロー (0.5–0.8 TeV) とは別の信号。</a:t>
+              <a:t>数字は docs/verification/verdict.md と docs/HANDOFF.md から。</a:t>
+            </a:r>
+          </a:p>
+          <a:p>
+            <a:r>
+              <a:t>ICS (逆コンプトン散乱) = 宇宙線の電子が星の光をはね上げて出すガンマ線。銀河全体に広がっていて、ハローと形がよく似ている。</a:t>
+            </a:r>
+          </a:p>
+          <a:p>
+            <a:r>
+              <a:t>縮退 = 2つの成分の形が似ていて、フィットでどちらに割り振っても同じくらい合ってしまう状態。</a:t>
+            </a:r>
+          </a:p>
+          <a:p>
+            <a:r>
+              <a:t>同じ面積を経度方向にずらして外しても ICS は 0.46–0.79 のまま。本物のバブル位置を外したときだけ 1.025 に戻る → ICS のズレはバブル/銀河中心方向に集中している。これが今回の一番確かな成果。</a:t>
+            </a:r>
+          </a:p>
+          <a:p>
+            <a:r>
+              <a:t>Totani の報告は 13–19σ。19.1σ は名目値なので「19σ だから確実」とは言わない。</a:t>
+            </a:r>
+          </a:p>
+          <a:p>
+            <a:r>
+              <a:t>(聞かれたら) バブル除外で Bin6 は 19.0σ → 4.96σ。同面積を経度方向にずらすと 13.4–16.3σ なのでバブル固有。ただし低下の過半はデータが減ったせいで、バブル固有分は約 37%。</a:t>
             </a:r>
           </a:p>
         </p:txBody>
@@ -608,17 +626,252 @@
           <a:lstStyle/>
           <a:p>
             <a:r>
+              <a:t>conclusions の内容。95% 上限なのに、本物を除外する割合が 5% を大きく超える = 約束が守られていない (アンダーカバレッジ)。</a:t>
+            </a:r>
+          </a:p>
+          <a:p>
+            <a:r>
+              <a:t>27 個あると、たまたま J が大きく出た天体がまざり、全体の上限を強く引っ張ってしまう。</a:t>
+            </a:r>
+          </a:p>
+          <a:p>
+            <a:r>
+              <a:t>「何も無い領域」= blank field。本文にある具体的な割合 (Section V) は使わない。</a:t>
+            </a:r>
+          </a:p>
+        </p:txBody>
+      </p:sp>
+      <p:sp>
+        <p:nvSpPr>
+          <p:cNvPr id="4" name="Slide Number Placeholder 3"/>
+          <p:cNvSpPr>
+            <a:spLocks noGrp="1"/>
+          </p:cNvSpPr>
+          <p:nvPr>
+            <p:ph type="sldNum" idx="5" sz="quarter"/>
+          </p:nvPr>
+        </p:nvSpPr>
+        <p:spPr/>
+      </p:sp>
+    </p:spTree>
+  </p:cSld>
+  <p:clrMapOvr>
+    <a:masterClrMapping/>
+  </p:clrMapOvr>
+</p:notes>
+</file>
+
+<file path=ppt/notesSlides/notesSlide11.xml><?xml version="1.0" encoding="utf-8"?>
+<p:notes xmlns:a="http://schemas.openxmlformats.org/drawingml/2006/main" xmlns:p="http://schemas.openxmlformats.org/presentationml/2006/main" xmlns:r="http://schemas.openxmlformats.org/officeDocument/2006/relationships">
+  <p:cSld>
+    <p:spTree>
+      <p:nvGrpSpPr>
+        <p:cNvPr id="1" name=""/>
+        <p:cNvGrpSpPr/>
+        <p:nvPr/>
+      </p:nvGrpSpPr>
+      <p:grpSpPr>
+        <a:xfrm>
+          <a:off x="0" y="0"/>
+          <a:ext cx="0" cy="0"/>
+          <a:chOff x="0" y="0"/>
+          <a:chExt cx="0" cy="0"/>
+        </a:xfrm>
+      </p:grpSpPr>
+      <p:sp>
+        <p:nvSpPr>
+          <p:cNvPr id="2" name="Slide Image Placeholder 1"/>
+          <p:cNvSpPr>
+            <a:spLocks noGrp="1"/>
+          </p:cNvSpPr>
+          <p:nvPr>
+            <p:ph type="sldImg" idx="2"/>
+          </p:nvPr>
+        </p:nvSpPr>
+        <p:spPr/>
+      </p:sp>
+      <p:sp>
+        <p:nvSpPr>
+          <p:cNvPr id="3" name="Notes Placeholder 2"/>
+          <p:cNvSpPr>
+            <a:spLocks noGrp="1"/>
+          </p:cNvSpPr>
+          <p:nvPr>
+            <p:ph type="body" idx="3" sz="quarter"/>
+          </p:nvPr>
+        </p:nvSpPr>
+        <p:spPr/>
+        <p:txBody>
+          <a:bodyPr/>
+          <a:lstStyle/>
+          <a:p>
+            <a:r>
+              <a:t>conclusions の内容。本当は cNFW 型のハローを、別の形で解析した場合。</a:t>
+            </a:r>
+          </a:p>
+          <a:p>
+            <a:r>
+              <a:t>論文は、ハローの形や広がりも決め打ちせず、解析の中で動かせるようにすべきだと提案している。</a:t>
+            </a:r>
+          </a:p>
+        </p:txBody>
+      </p:sp>
+      <p:sp>
+        <p:nvSpPr>
+          <p:cNvPr id="4" name="Slide Number Placeholder 3"/>
+          <p:cNvSpPr>
+            <a:spLocks noGrp="1"/>
+          </p:cNvSpPr>
+          <p:nvPr>
+            <p:ph type="sldNum" idx="5" sz="quarter"/>
+          </p:nvPr>
+        </p:nvSpPr>
+        <p:spPr/>
+      </p:sp>
+    </p:spTree>
+  </p:cSld>
+  <p:clrMapOvr>
+    <a:masterClrMapping/>
+  </p:clrMapOvr>
+</p:notes>
+</file>
+
+<file path=ppt/notesSlides/notesSlide12.xml><?xml version="1.0" encoding="utf-8"?>
+<p:notes xmlns:a="http://schemas.openxmlformats.org/drawingml/2006/main" xmlns:p="http://schemas.openxmlformats.org/presentationml/2006/main" xmlns:r="http://schemas.openxmlformats.org/officeDocument/2006/relationships">
+  <p:cSld>
+    <p:spTree>
+      <p:nvGrpSpPr>
+        <p:cNvPr id="1" name=""/>
+        <p:cNvGrpSpPr/>
+        <p:nvPr/>
+      </p:nvGrpSpPr>
+      <p:grpSpPr>
+        <a:xfrm>
+          <a:off x="0" y="0"/>
+          <a:ext cx="0" cy="0"/>
+          <a:chOff x="0" y="0"/>
+          <a:chExt cx="0" cy="0"/>
+        </a:xfrm>
+      </p:grpSpPr>
+      <p:sp>
+        <p:nvSpPr>
+          <p:cNvPr id="2" name="Slide Image Placeholder 1"/>
+          <p:cNvSpPr>
+            <a:spLocks noGrp="1"/>
+          </p:cNvSpPr>
+          <p:nvPr>
+            <p:ph type="sldImg" idx="2"/>
+          </p:nvPr>
+        </p:nvSpPr>
+        <p:spPr/>
+      </p:sp>
+      <p:sp>
+        <p:nvSpPr>
+          <p:cNvPr id="3" name="Notes Placeholder 2"/>
+          <p:cNvSpPr>
+            <a:spLocks noGrp="1"/>
+          </p:cNvSpPr>
+          <p:nvPr>
+            <p:ph type="body" idx="3" sz="quarter"/>
+          </p:nvPr>
+        </p:nvSpPr>
+        <p:spPr/>
+        <p:txBody>
+          <a:bodyPr/>
+          <a:lstStyle/>
+          <a:p>
+            <a:r>
+              <a:t>conclusions の最後の内容。</a:t>
+            </a:r>
+          </a:p>
+          <a:p>
+            <a:r>
+              <a:t>「矮小銀河で信号が無くて当然」とまでは言っていない。「無いからダメ」と判断するのが早すぎるかも、という主張。</a:t>
+            </a:r>
+          </a:p>
+        </p:txBody>
+      </p:sp>
+      <p:sp>
+        <p:nvSpPr>
+          <p:cNvPr id="4" name="Slide Number Placeholder 3"/>
+          <p:cNvSpPr>
+            <a:spLocks noGrp="1"/>
+          </p:cNvSpPr>
+          <p:nvPr>
+            <p:ph type="sldNum" idx="5" sz="quarter"/>
+          </p:nvPr>
+        </p:nvSpPr>
+        <p:spPr/>
+      </p:sp>
+    </p:spTree>
+  </p:cSld>
+  <p:clrMapOvr>
+    <a:masterClrMapping/>
+  </p:clrMapOvr>
+</p:notes>
+</file>
+
+<file path=ppt/notesSlides/notesSlide13.xml><?xml version="1.0" encoding="utf-8"?>
+<p:notes xmlns:a="http://schemas.openxmlformats.org/drawingml/2006/main" xmlns:p="http://schemas.openxmlformats.org/presentationml/2006/main" xmlns:r="http://schemas.openxmlformats.org/officeDocument/2006/relationships">
+  <p:cSld>
+    <p:spTree>
+      <p:nvGrpSpPr>
+        <p:cNvPr id="1" name=""/>
+        <p:cNvGrpSpPr/>
+        <p:nvPr/>
+      </p:nvGrpSpPr>
+      <p:grpSpPr>
+        <a:xfrm>
+          <a:off x="0" y="0"/>
+          <a:ext cx="0" cy="0"/>
+          <a:chOff x="0" y="0"/>
+          <a:chExt cx="0" cy="0"/>
+        </a:xfrm>
+      </p:grpSpPr>
+      <p:sp>
+        <p:nvSpPr>
+          <p:cNvPr id="2" name="Slide Image Placeholder 1"/>
+          <p:cNvSpPr>
+            <a:spLocks noGrp="1"/>
+          </p:cNvSpPr>
+          <p:nvPr>
+            <p:ph type="sldImg" idx="2"/>
+          </p:nvPr>
+        </p:nvSpPr>
+        <p:spPr/>
+      </p:sp>
+      <p:sp>
+        <p:nvSpPr>
+          <p:cNvPr id="3" name="Notes Placeholder 2"/>
+          <p:cNvSpPr>
+            <a:spLocks noGrp="1"/>
+          </p:cNvSpPr>
+          <p:nvPr>
+            <p:ph type="body" idx="3" sz="quarter"/>
+          </p:nvPr>
+        </p:nvSpPr>
+        <p:spPr/>
+        <p:txBody>
+          <a:bodyPr/>
+          <a:lstStyle/>
+          <a:p>
+            <a:r>
               <a:t>数字は docs/verification/verdict.md と docs/HANDOFF.md から。</a:t>
             </a:r>
           </a:p>
           <a:p>
             <a:r>
-              <a:t>19.1σ は名目値なので「19σ だから確実」とは言わない。</a:t>
-            </a:r>
-          </a:p>
-          <a:p>
-            <a:r>
-              <a:t>GCE は 35–65 GeV の WIMP、Totani の 20 GeV ハローは 0.5–0.8 TeV の WIMP。共通するのは「天の川の信号 vs 矮小銀河の上限」という構図だけ。</a:t>
+              <a:t>較正は 2026-07-31 に実施。空の領域では平均 −0.021、標準偏差 1.362、最大 4.50σ、|σ|&gt;3 が 2.4% (理論なら 0.27%)。</a:t>
+            </a:r>
+          </a:p>
+          <a:p>
+            <a:r>
+              <a:t>弱点として正直に言う: 矮小銀河の J の誤差をゼロとして扱っていた。</a:t>
+            </a:r>
+          </a:p>
+          <a:p>
+            <a:r>
+              <a:t>予測の出し直しは本体リポジトリで計算する (卒論は 12 月執筆・1 月発表なので、大がかりな新規解析はしない)。</a:t>
             </a:r>
           </a:p>
         </p:txBody>
@@ -688,17 +941,22 @@
           <a:lstStyle/>
           <a:p>
             <a:r>
-              <a:t>introduction の内容。</a:t>
-            </a:r>
-          </a:p>
-          <a:p>
-            <a:r>
-              <a:t>J ファクターは「暗黒物質の密度の2乗を視線方向に積分した量」。2乗なのは、対消滅には粒子が2つ必要だから。密度が2倍なら信号は4倍。</a:t>
-            </a:r>
-          </a:p>
-          <a:p>
-            <a:r>
-              <a:t>観測で決まるのは ⟨σv⟩ × J の組み合わせなので、J の見積もりがずれると ⟨σv⟩ の上限もずれる。</a:t>
+              <a:t>79 か所 = 矮小銀河 54 (LMC/SMC 含む) + M31/M33 + 対照フィールド 23 (2026-07-31)。</a:t>
+            </a:r>
+          </a:p>
+          <a:p>
+            <a:r>
+              <a:t>予測は「天の川のハローの明るさ × (矮小銀河の J / 天の川の J)」で出した。粒子の性質 (質量など) は比をとると消えるので仮定していない。</a:t>
+            </a:r>
+          </a:p>
+          <a:p>
+            <a:r>
+              <a:t>ただし天の川側の密度 (ρ_s) の仮定が2乗で効くので、予測は 1.35–5.4σ という幅になる。実測 −0.18σ と強く矛盾するとは言えない (verdict.md の C3)。</a:t>
+            </a:r>
+          </a:p>
+          <a:p>
+            <a:r>
+              <a:t>ここで矮小銀河の J の誤差はゼロとして扱っていた → 次のスライドへ。</a:t>
             </a:r>
           </a:p>
         </p:txBody>
@@ -768,12 +1026,17 @@
           <a:lstStyle/>
           <a:p>
             <a:r>
-              <a:t>abstract の内容。誤差の原因の個別の説明は本文 (Section II) なので深入りしない。</a:t>
-            </a:r>
-          </a:p>
-          <a:p>
-            <a:r>
-              <a:t>Δlog10J = 0.5 は、J が 10^0.5 ≒ 3 倍くらいずれうる、という意味。</a:t>
+              <a:t>つなぎのスライド。</a:t>
+            </a:r>
+          </a:p>
+          <a:p>
+            <a:r>
+              <a:t>この論文の信号 (銀河中心 GeV 超過 GCE、35–65 GeV の WIMP) と、僕の信号 (Totani の 20 GeV ハロー、0.5–0.8 TeV の WIMP) は別物。</a:t>
+            </a:r>
+          </a:p>
+          <a:p>
+            <a:r>
+              <a:t>共通するのは「天の川の信号 vs 矮小銀河の上限」という構図。矮小銀河の J の誤差の話は、どちらの信号でも同じように効く。</a:t>
             </a:r>
           </a:p>
         </p:txBody>
@@ -843,12 +1106,12 @@
           <a:lstStyle/>
           <a:p>
             <a:r>
-              <a:t>答えがわかっている仮想の宇宙を作って、解析がちゃんと正解を出せるか試した、というイメージ。</a:t>
-            </a:r>
-          </a:p>
-          <a:p>
-            <a:r>
-              <a:t>「95% 上限」は本来、本物の値を間違って除外するのが 5% 以下になるはずのもの。この約束が守られているか (カバレッジ) を調べている。</a:t>
+              <a:t>introduction の内容。銀河中心 GeV 超過 = GCE。</a:t>
+            </a:r>
+          </a:p>
+          <a:p>
+            <a:r>
+              <a:t>パルサー説への反論は3つ: 銀河の内側でパルサーがほとんど見つかっていない / パルサーのもとになる X 線連星が少なく、超過の 4–11% しか説明できない / パルサーは生まれたときに飛ばされて広がるはずなのに、超過は中心に集中しすぎている。</a:t>
             </a:r>
           </a:p>
         </p:txBody>
@@ -918,22 +1181,17 @@
           <a:lstStyle/>
           <a:p>
             <a:r>
-              <a:t>conclusions の内容。論文は σ (推定した J の本当のばらつき) と σ_L (解析で仮定する幅) を分けて動かした。</a:t>
-            </a:r>
-          </a:p>
-          <a:p>
-            <a:r>
-              <a:t>図は説明用のイメージで、論文の図ではない。幅 0.6 と 1.1 は見た目のための値。</a:t>
-            </a:r>
-          </a:p>
-          <a:p>
-            <a:r>
-              <a:t>log10 J が正規分布でばらつくとして描いている (論文も J の誤差を Δlog10J で表し、2乗和で足している)。</a:t>
-            </a:r>
-          </a:p>
-          <a:p>
-            <a:r>
-              <a:t>図は slides/figs/plot_sigma_vs_sigmaL.py で作った。</a:t>
+              <a:t>introduction の内容。</a:t>
+            </a:r>
+          </a:p>
+          <a:p>
+            <a:r>
+              <a:t>J ファクターは「暗黒物質の密度の2乗を視線方向に積分した量」。2乗なのは、対消滅には粒子が2つ必要だから。密度が2倍なら信号は4倍。</a:t>
+            </a:r>
+          </a:p>
+          <a:p>
+            <a:r>
+              <a:t>観測で決まるのは ⟨σv⟩ × J の組み合わせなので、J の見積もりがずれると ⟨σv⟩ の上限もずれる。</a:t>
             </a:r>
           </a:p>
         </p:txBody>
@@ -1003,12 +1261,17 @@
           <a:lstStyle/>
           <a:p>
             <a:r>
-              <a:t>abstract と conclusions の数字。誤差は「2乗和で足す」(合計 = √(元の誤差² + 足す誤差²))。</a:t>
-            </a:r>
-          </a:p>
-          <a:p>
-            <a:r>
-              <a:t>上限の値は、誤差の扱い方しだいで何倍も変わる、というのがポイント。</a:t>
+              <a:t>abstract の内容。誤差の原因の個別の説明は本文 (Section II) なので深入りしない。</a:t>
+            </a:r>
+          </a:p>
+          <a:p>
+            <a:r>
+              <a:t>文献ごとの J の値は、書かれている誤差よりも大きくばらついている。</a:t>
+            </a:r>
+          </a:p>
+          <a:p>
+            <a:r>
+              <a:t>Δlog10J = 0.5 は、J が 10^0.5 ≒ 3 倍くらいずれうる、という意味。</a:t>
             </a:r>
           </a:p>
         </p:txBody>
@@ -1078,17 +1341,12 @@
           <a:lstStyle/>
           <a:p>
             <a:r>
-              <a:t>conclusions の内容。95% 上限なのに、本物を除外する割合が 5% を大きく超える = 約束が守られていない (アンダーカバレッジ)。</a:t>
-            </a:r>
-          </a:p>
-          <a:p>
-            <a:r>
-              <a:t>27 個あると、たまたま J が大きく出た天体がまざり、全体の上限を強く引っ張ってしまう。</a:t>
-            </a:r>
-          </a:p>
-          <a:p>
-            <a:r>
-              <a:t>本文にある具体的な割合 (Section V) は使わない。</a:t>
+              <a:t>答えがわかっている仮想の宇宙を作って、解析がちゃんと正解を出せるか試した、というイメージ。</a:t>
+            </a:r>
+          </a:p>
+          <a:p>
+            <a:r>
+              <a:t>「95% 上限」は本来、本物の値を間違って除外するのが 5% 以下になるはずのもの。この約束が守られているか (カバレッジ) を調べている。</a:t>
             </a:r>
           </a:p>
         </p:txBody>
@@ -1158,12 +1416,22 @@
           <a:lstStyle/>
           <a:p>
             <a:r>
-              <a:t>conclusions の内容。本当は cNFW 型のハローを、別の形で解析した場合。</a:t>
-            </a:r>
-          </a:p>
-          <a:p>
-            <a:r>
-              <a:t>論文は、ハローの形や広がりも決め打ちせず、解析の中で動かせるようにすべきだと提案している。</a:t>
+              <a:t>conclusions の内容。論文は σ (推定した J の本当のばらつき) と σ_L (解析で仮定する幅) を分けて動かした。</a:t>
+            </a:r>
+          </a:p>
+          <a:p>
+            <a:r>
+              <a:t>図は説明用のイメージで、論文の図ではない。細い山 = ソフトの自信、太い山 = 本当のブレ。幅 0.6 と 1.1 は見た目のための値。</a:t>
+            </a:r>
+          </a:p>
+          <a:p>
+            <a:r>
+              <a:t>log10 J が正規分布でばらつくとして描いている (論文も J の誤差を Δlog10J で表し、2乗和で足している)。</a:t>
+            </a:r>
+          </a:p>
+          <a:p>
+            <a:r>
+              <a:t>図は slides/figs/plot_sigma_vs_sigmaL.py で作った。</a:t>
             </a:r>
           </a:p>
         </p:txBody>
@@ -1233,12 +1501,12 @@
           <a:lstStyle/>
           <a:p>
             <a:r>
-              <a:t>conclusions の最後の内容。</a:t>
-            </a:r>
-          </a:p>
-          <a:p>
-            <a:r>
-              <a:t>「矮小銀河で信号が無くて当然」とまでは言っていない。「無いからダメ」と判断するのが早すぎるかも、という主張。</a:t>
+              <a:t>abstract と conclusions の数字。誤差は「2乗和で足す」(合計 = √(元の誤差² + 足す誤差²))。</a:t>
+            </a:r>
+          </a:p>
+          <a:p>
+            <a:r>
+              <a:t>上限の値は、誤差の扱い方しだいで何倍も変わる、というのがポイント。</a:t>
             </a:r>
           </a:p>
         </p:txBody>
@@ -4607,8 +4875,8 @@
           <a:lstStyle/>
           <a:p>
             <a:r>
-              <a:rPr sz="3400"/>
-              <a:t>まとめ</a:t>
+              <a:rPr sz="4000"/>
+              <a:t>わかったこと①：誤差を正直に広げると</a:t>
             </a:r>
           </a:p>
         </p:txBody>
@@ -4630,29 +4898,36 @@
           <a:p>
             <a:pPr/>
             <a:r>
-              <a:rPr sz="2200"/>
-              <a:t>J の誤差やハローの形をきちんと扱わないと、矮小銀河の上限は厳しく出すぎる</a:t>
+              <a:rPr sz="3000"/>
+              <a:t>上限がゆるくなる（否定する力が弱まる）</a:t>
             </a:r>
           </a:p>
           <a:p>
             <a:pPr/>
             <a:r>
-              <a:rPr sz="2200"/>
-              <a:t>なので「銀河中心の信号と矮小銀河が矛盾する」と言い切るのはまだ早い</a:t>
+              <a:rPr sz="3000"/>
+              <a:t>Ursa Minor 1 個</a:t>
+            </a:r>
+          </a:p>
+          <a:p>
+            <a:pPr lvl="1"/>
+            <a:r>
+              <a:rPr sz="2400"/>
+              <a:t>誤差 +0.3 / +0.5 / +1.0 → 1.5 / 2.5 / 11 倍ゆるく</a:t>
             </a:r>
           </a:p>
           <a:p>
             <a:pPr/>
             <a:r>
-              <a:rPr sz="2200"/>
-              <a:t>矮小銀河が大事な確認役であることは変わらない</a:t>
-            </a:r>
-          </a:p>
-          <a:p>
-            <a:pPr/>
-            <a:r>
-              <a:rPr sz="2200"/>
-              <a:t>今後は、J の誤差をもっと良く抑えることが必要</a:t>
+              <a:rPr sz="3000"/>
+              <a:t>27 個まとめた解析</a:t>
+            </a:r>
+          </a:p>
+          <a:p>
+            <a:pPr lvl="1"/>
+            <a:r>
+              <a:rPr sz="2400"/>
+              <a:t>誤差 +0.5 / +1.0 → 1.4 / 3.2 倍ゆるく</a:t>
             </a:r>
           </a:p>
         </p:txBody>
@@ -4691,8 +4966,8 @@
           <a:lstStyle/>
           <a:p>
             <a:r>
-              <a:rPr sz="3400"/>
-              <a:t>卒論とのつながり</a:t>
+              <a:rPr sz="4000"/>
+              <a:t>わかったこと②：誤差を小さく見積もると</a:t>
             </a:r>
           </a:p>
         </p:txBody>
@@ -4714,43 +4989,309 @@
           <a:p>
             <a:pPr/>
             <a:r>
-              <a:rPr sz="2000"/>
-              <a:t>僕の主結果（Bin6, 20.76 GeV で 19.1σ）の σ は名目値</a:t>
+              <a:rPr sz="3000"/>
+              <a:t>本物を「無い」と間違えやすくなる</a:t>
+            </a:r>
+          </a:p>
+          <a:p>
+            <a:pPr/>
+            <a:r>
+              <a:rPr sz="3000"/>
+              <a:t>27 個まとめた解析では特にひどい</a:t>
             </a:r>
           </a:p>
           <a:p>
             <a:pPr lvl="1"/>
             <a:r>
-              <a:rPr sz="1700"/>
-              <a:t>何も無い空の領域 833 か所で試すと、ばらつきは 1 ではなく 1.362、最大 4.50σ</a:t>
+              <a:rPr sz="2400"/>
+              <a:t>ふつうの設定でも、5% をはるかに超える頻度で間違える</a:t>
             </a:r>
           </a:p>
           <a:p>
             <a:pPr lvl="1"/>
             <a:r>
-              <a:rPr sz="1700"/>
-              <a:t>論文がすすめる blank field での較正は、2026-07-31 にやっていた</a:t>
+              <a:rPr sz="2400"/>
+              <a:t>誤差を正しく合わせても、完全には直らない</a:t>
             </a:r>
           </a:p>
           <a:p>
             <a:pPr/>
             <a:r>
-              <a:rPr sz="2000"/>
-              <a:t>弱点：矮小銀河の J の誤差をゼロとして扱っていた</a:t>
+              <a:rPr sz="3000"/>
+              <a:t>論文のおすすめ：何も無い領域で試して較正する</a:t>
+            </a:r>
+          </a:p>
+        </p:txBody>
+      </p:sp>
+    </p:spTree>
+  </p:cSld>
+  <p:clrMapOvr>
+    <a:masterClrMapping/>
+  </p:clrMapOvr>
+</p:sld>
+</file>
+
+<file path=ppt/slides/slide12.xml><?xml version="1.0" encoding="utf-8"?>
+<p:sld xmlns:a="http://schemas.openxmlformats.org/drawingml/2006/main" xmlns:p="http://schemas.openxmlformats.org/presentationml/2006/main" xmlns:r="http://schemas.openxmlformats.org/officeDocument/2006/relationships">
+  <p:cSld>
+    <p:spTree>
+      <p:nvGrpSpPr>
+        <p:cNvPr id="1" name=""/>
+        <p:cNvGrpSpPr/>
+        <p:nvPr/>
+      </p:nvGrpSpPr>
+      <p:grpSpPr/>
+      <p:sp>
+        <p:nvSpPr>
+          <p:cNvPr id="2" name="Title 1"/>
+          <p:cNvSpPr>
+            <a:spLocks noGrp="1"/>
+          </p:cNvSpPr>
+          <p:nvPr>
+            <p:ph type="title"/>
+          </p:nvPr>
+        </p:nvSpPr>
+        <p:spPr/>
+        <p:txBody>
+          <a:bodyPr/>
+          <a:lstStyle/>
+          <a:p>
+            <a:r>
+              <a:rPr sz="4000"/>
+              <a:t>わかったこと③：ハローの形を間違えると</a:t>
+            </a:r>
+          </a:p>
+        </p:txBody>
+      </p:sp>
+      <p:sp>
+        <p:nvSpPr>
+          <p:cNvPr id="3" name="Content Placeholder 2"/>
+          <p:cNvSpPr>
+            <a:spLocks noGrp="1"/>
+          </p:cNvSpPr>
+          <p:nvPr>
+            <p:ph idx="1"/>
+          </p:nvPr>
+        </p:nvSpPr>
+        <p:spPr/>
+        <p:txBody>
+          <a:bodyPr/>
+          <a:lstStyle/>
+          <a:p>
+            <a:pPr/>
+            <a:r>
+              <a:rPr sz="3000"/>
+              <a:t>上限が厳しく出すぎる</a:t>
+            </a:r>
+          </a:p>
+          <a:p>
+            <a:pPr/>
+            <a:r>
+              <a:rPr sz="3000"/>
+              <a:t>Ursa Minor の場合</a:t>
             </a:r>
           </a:p>
           <a:p>
             <a:pPr lvl="1"/>
             <a:r>
-              <a:rPr sz="1700"/>
-              <a:t>矮小銀河の期待信号は 1.35–5.4σ。J の誤差を入れると幅はさらに広がり、判定できない</a:t>
+              <a:rPr sz="2400"/>
+              <a:t>形を間違える（球対称の NFW で解析）→ 2.4 倍</a:t>
+            </a:r>
+          </a:p>
+          <a:p>
+            <a:pPr lvl="1"/>
+            <a:r>
+              <a:rPr sz="2400"/>
+              <a:t>広がりを無視する（点として解析）→ 1.4 倍</a:t>
             </a:r>
           </a:p>
           <a:p>
             <a:pPr/>
             <a:r>
-              <a:rPr sz="2000"/>
-              <a:t>注意：この論文の信号（GCE）と、Totani の 20 GeV ハローは別の信号</a:t>
+              <a:rPr sz="3000"/>
+              <a:t>27 個全部を点として扱うと、本物を除外しやすい</a:t>
+            </a:r>
+          </a:p>
+        </p:txBody>
+      </p:sp>
+    </p:spTree>
+  </p:cSld>
+  <p:clrMapOvr>
+    <a:masterClrMapping/>
+  </p:clrMapOvr>
+</p:sld>
+</file>
+
+<file path=ppt/slides/slide13.xml><?xml version="1.0" encoding="utf-8"?>
+<p:sld xmlns:a="http://schemas.openxmlformats.org/drawingml/2006/main" xmlns:p="http://schemas.openxmlformats.org/presentationml/2006/main" xmlns:r="http://schemas.openxmlformats.org/officeDocument/2006/relationships">
+  <p:cSld>
+    <p:spTree>
+      <p:nvGrpSpPr>
+        <p:cNvPr id="1" name=""/>
+        <p:cNvGrpSpPr/>
+        <p:nvPr/>
+      </p:nvGrpSpPr>
+      <p:grpSpPr/>
+      <p:sp>
+        <p:nvSpPr>
+          <p:cNvPr id="2" name="Title 1"/>
+          <p:cNvSpPr>
+            <a:spLocks noGrp="1"/>
+          </p:cNvSpPr>
+          <p:nvPr>
+            <p:ph type="title"/>
+          </p:nvPr>
+        </p:nvSpPr>
+        <p:spPr/>
+        <p:txBody>
+          <a:bodyPr/>
+          <a:lstStyle/>
+          <a:p>
+            <a:r>
+              <a:rPr sz="4000"/>
+              <a:t>論文のまとめ</a:t>
+            </a:r>
+          </a:p>
+        </p:txBody>
+      </p:sp>
+      <p:sp>
+        <p:nvSpPr>
+          <p:cNvPr id="3" name="Content Placeholder 2"/>
+          <p:cNvSpPr>
+            <a:spLocks noGrp="1"/>
+          </p:cNvSpPr>
+          <p:nvPr>
+            <p:ph idx="1"/>
+          </p:nvPr>
+        </p:nvSpPr>
+        <p:spPr/>
+        <p:txBody>
+          <a:bodyPr/>
+          <a:lstStyle/>
+          <a:p>
+            <a:pPr/>
+            <a:r>
+              <a:rPr sz="3000"/>
+              <a:t>J の誤差や形を雑に扱うと、上限は厳しく出すぎる</a:t>
+            </a:r>
+          </a:p>
+          <a:p>
+            <a:pPr/>
+            <a:r>
+              <a:rPr sz="3000"/>
+              <a:t>「銀河中心と矮小銀河が矛盾する」とは、まだ言えない</a:t>
+            </a:r>
+          </a:p>
+          <a:p>
+            <a:pPr/>
+            <a:r>
+              <a:rPr sz="3000"/>
+              <a:t>矮小銀河が大事な確認役なのは変わらない</a:t>
+            </a:r>
+          </a:p>
+          <a:p>
+            <a:pPr/>
+            <a:r>
+              <a:rPr sz="3000"/>
+              <a:t>今後は、J の誤差をもっと抑えることが必要</a:t>
+            </a:r>
+          </a:p>
+        </p:txBody>
+      </p:sp>
+    </p:spTree>
+  </p:cSld>
+  <p:clrMapOvr>
+    <a:masterClrMapping/>
+  </p:clrMapOvr>
+</p:sld>
+</file>
+
+<file path=ppt/slides/slide14.xml><?xml version="1.0" encoding="utf-8"?>
+<p:sld xmlns:a="http://schemas.openxmlformats.org/drawingml/2006/main" xmlns:p="http://schemas.openxmlformats.org/presentationml/2006/main" xmlns:r="http://schemas.openxmlformats.org/officeDocument/2006/relationships">
+  <p:cSld>
+    <p:spTree>
+      <p:nvGrpSpPr>
+        <p:cNvPr id="1" name=""/>
+        <p:cNvGrpSpPr/>
+        <p:nvPr/>
+      </p:nvGrpSpPr>
+      <p:grpSpPr/>
+      <p:sp>
+        <p:nvSpPr>
+          <p:cNvPr id="2" name="Title 1"/>
+          <p:cNvSpPr>
+            <a:spLocks noGrp="1"/>
+          </p:cNvSpPr>
+          <p:nvPr>
+            <p:ph type="title"/>
+          </p:nvPr>
+        </p:nvSpPr>
+        <p:spPr/>
+        <p:txBody>
+          <a:bodyPr/>
+          <a:lstStyle/>
+          <a:p>
+            <a:r>
+              <a:rPr sz="4000"/>
+              <a:t>論文の結果を、僕の研究に当てはめると</a:t>
+            </a:r>
+          </a:p>
+        </p:txBody>
+      </p:sp>
+      <p:sp>
+        <p:nvSpPr>
+          <p:cNvPr id="3" name="Content Placeholder 2"/>
+          <p:cNvSpPr>
+            <a:spLocks noGrp="1"/>
+          </p:cNvSpPr>
+          <p:nvPr>
+            <p:ph idx="1"/>
+          </p:nvPr>
+        </p:nvSpPr>
+        <p:spPr/>
+        <p:txBody>
+          <a:bodyPr/>
+          <a:lstStyle/>
+          <a:p>
+            <a:pPr/>
+            <a:r>
+              <a:rPr sz="3000"/>
+              <a:t>論文がすすめる「何も無い領域での較正」は、やっていた</a:t>
+            </a:r>
+          </a:p>
+          <a:p>
+            <a:pPr lvl="1"/>
+            <a:r>
+              <a:rPr sz="2400"/>
+              <a:t>空の領域 833 か所で、σ のばらつきは 1 ではなく 1.362</a:t>
+            </a:r>
+          </a:p>
+          <a:p>
+            <a:pPr lvl="1"/>
+            <a:r>
+              <a:rPr sz="2400"/>
+              <a:t>19.1σ は名目値。「19σ だから確実」とは言えない</a:t>
+            </a:r>
+          </a:p>
+          <a:p>
+            <a:pPr/>
+            <a:r>
+              <a:rPr sz="3000"/>
+              <a:t>J の誤差（約 3 倍）を入れると、矮小銀河の予測はさらに広がる</a:t>
+            </a:r>
+          </a:p>
+          <a:p>
+            <a:pPr lvl="1"/>
+            <a:r>
+              <a:rPr sz="2400"/>
+              <a:t>1.35–5.4σ よりも広くなり、やはり判定できない</a:t>
+            </a:r>
+          </a:p>
+          <a:p>
+            <a:pPr/>
+            <a:r>
+              <a:rPr sz="3000"/>
+              <a:t>今後：J の誤差を入れて、予測を出し直す</a:t>
             </a:r>
           </a:p>
         </p:txBody>
@@ -4789,8 +5330,8 @@
           <a:lstStyle/>
           <a:p>
             <a:r>
-              <a:rPr sz="3400"/>
-              <a:t>背景：銀河中心のガンマ線超過</a:t>
+              <a:rPr sz="4000"/>
+              <a:t>僕の研究①：ICS とハローの縮退</a:t>
             </a:r>
           </a:p>
         </p:txBody>
@@ -4812,29 +5353,43 @@
           <a:p>
             <a:pPr/>
             <a:r>
-              <a:rPr sz="2200"/>
-              <a:t>Fermi-LAT で、銀河中心から余分なガンマ線が見つかっている</a:t>
+              <a:rPr sz="3000"/>
+              <a:t>Totani の 20 GeV ハローを再現（Bin6 で 19.1σ）</a:t>
             </a:r>
           </a:p>
           <a:p>
             <a:pPr/>
             <a:r>
-              <a:rPr sz="2200"/>
-              <a:t>暗黒物質（WIMP）が対消滅していると考えると、うまく説明できる</a:t>
+              <a:rPr sz="3000"/>
+              <a:t>既知のガンマ線を引いて、残りをハローとみなす</a:t>
+            </a:r>
+          </a:p>
+          <a:p>
+            <a:pPr/>
+            <a:r>
+              <a:rPr sz="3000"/>
+              <a:t>ICS とハローは、空での形がよく似ている</a:t>
             </a:r>
           </a:p>
           <a:p>
             <a:pPr lvl="1"/>
             <a:r>
-              <a:rPr sz="1900"/>
-              <a:t>質量 35–65 GeV、⟨σv⟩ ≈ (1–3)×10⁻²⁶ cm³/s</a:t>
+              <a:rPr sz="2400"/>
+              <a:t>片方の分を、もう片方が肩代わりできる（縮退）</a:t>
             </a:r>
           </a:p>
           <a:p>
             <a:pPr/>
             <a:r>
-              <a:rPr sz="2200"/>
-              <a:t>ミリ秒パルサーで説明する説もあるが、否定的な材料が多い</a:t>
+              <a:rPr sz="3000"/>
+              <a:t>バブル領域を外したときだけ、ICS が正常に戻った</a:t>
+            </a:r>
+          </a:p>
+          <a:p>
+            <a:pPr lvl="1"/>
+            <a:r>
+              <a:rPr sz="2400"/>
+              <a:t>ICS の強さ：外さない 0.605 → 外す 1.025（本来は約 1）</a:t>
             </a:r>
           </a:p>
         </p:txBody>
@@ -4873,8 +5428,8 @@
           <a:lstStyle/>
           <a:p>
             <a:r>
-              <a:rPr sz="3400"/>
-              <a:t>確認役としての矮小銀河</a:t>
+              <a:rPr sz="4000"/>
+              <a:t>僕の研究②：矮小銀河への拡張</a:t>
             </a:r>
           </a:p>
         </p:txBody>
@@ -4896,43 +5451,36 @@
           <a:p>
             <a:pPr/>
             <a:r>
-              <a:rPr sz="2200"/>
-              <a:t>本当に暗黒物質なら、矮小銀河からも同じガンマ線が来るはず</a:t>
+              <a:rPr sz="3000"/>
+              <a:t>同じ手法を、矮小銀河など 79 か所に使った</a:t>
+            </a:r>
+          </a:p>
+          <a:p>
+            <a:pPr lvl="1"/>
+            <a:r>
+              <a:rPr sz="2400"/>
+              <a:t>どこにも信号は見えなかった（最大 +3.46σ）</a:t>
             </a:r>
           </a:p>
           <a:p>
             <a:pPr/>
             <a:r>
-              <a:rPr sz="2200"/>
-              <a:t>矮小銀河の信号は銀河中心より 10³〜10⁴ 倍以上弱い</a:t>
+              <a:rPr sz="3000"/>
+              <a:t>天の川のハローから、矮小銀河で見えるはずの信号を予測</a:t>
+            </a:r>
+          </a:p>
+          <a:p>
+            <a:pPr lvl="1"/>
+            <a:r>
+              <a:rPr sz="2400"/>
+              <a:t>予測 1.35–5.4σ　／　実測 −0.18σ</a:t>
             </a:r>
           </a:p>
           <a:p>
             <a:pPr/>
             <a:r>
-              <a:rPr sz="2200"/>
-              <a:t>でもガスや星形成がほとんど無く、ほかのガンマ線が少ない</a:t>
-            </a:r>
-          </a:p>
-          <a:p>
-            <a:pPr/>
-            <a:r>
-              <a:rPr sz="2200"/>
-              <a:t>どれくらい光るはずかは「J ファクター」で決まる</a:t>
-            </a:r>
-          </a:p>
-          <a:p>
-            <a:pPr lvl="1"/>
-            <a:r>
-              <a:rPr sz="1900"/>
-              <a:t>J ファクター = 暗黒物質の密度を2乗して、視線方向に足し合わせた量</a:t>
-            </a:r>
-          </a:p>
-          <a:p>
-            <a:pPr lvl="1"/>
-            <a:r>
-              <a:rPr sz="1900"/>
-              <a:t>矮小銀河の J は、星の動きから推定するしかない</a:t>
+              <a:rPr sz="3000"/>
+              <a:t>予測の幅が広く、矛盾とも一致とも言えない</a:t>
             </a:r>
           </a:p>
         </p:txBody>
@@ -4971,8 +5519,8 @@
           <a:lstStyle/>
           <a:p>
             <a:r>
-              <a:rPr sz="3400"/>
-              <a:t>この論文の問題意識</a:t>
+              <a:rPr sz="4000"/>
+              <a:t>ここで、この論文が使える</a:t>
             </a:r>
           </a:p>
         </p:txBody>
@@ -4994,43 +5542,29 @@
           <a:p>
             <a:pPr/>
             <a:r>
-              <a:rPr sz="2200"/>
-              <a:t>矮小銀河の J の誤差は、小さく見積もられているのではないか</a:t>
+              <a:rPr sz="3000"/>
+              <a:t>矮小銀河の予測は、J ファクター（どれくらい光るかの見込み）で決まる</a:t>
             </a:r>
           </a:p>
           <a:p>
             <a:pPr/>
             <a:r>
-              <a:rPr sz="2200"/>
-              <a:t>誤差の原因として、次のようなものが見落とされがち</a:t>
-            </a:r>
-          </a:p>
-          <a:p>
-            <a:pPr lvl="1"/>
-            <a:r>
-              <a:rPr sz="1900"/>
-              <a:t>どの星が矮小銀河のメンバーか / 見分けられていない連星</a:t>
-            </a:r>
-          </a:p>
-          <a:p>
-            <a:pPr lvl="1"/>
-            <a:r>
-              <a:rPr sz="1900"/>
-              <a:t>釣り合いや球対称からのズレ / 密度分布の形の仮定</a:t>
+              <a:rPr sz="3000"/>
+              <a:t>僕は、矮小銀河の J の誤差をゼロとして扱っていた</a:t>
             </a:r>
           </a:p>
           <a:p>
             <a:pPr/>
             <a:r>
-              <a:rPr sz="2200"/>
-              <a:t>文献ごとの J の値は、書かれている誤差より大きくばらついている</a:t>
+              <a:rPr sz="3000"/>
+              <a:t>この論文：J の誤差は小さく見積もられがちで、結果に大きく響く</a:t>
             </a:r>
           </a:p>
           <a:p>
             <a:pPr/>
             <a:r>
-              <a:rPr sz="2200"/>
-              <a:t>Δlog₁₀J ≈ 0.5（約3倍）くらいの誤差は見込むべき</a:t>
+              <a:rPr sz="3000"/>
+              <a:t>→ 僕の矮小銀河の結果にも、そのまま当てはまる</a:t>
             </a:r>
           </a:p>
         </p:txBody>
@@ -5069,8 +5603,8 @@
           <a:lstStyle/>
           <a:p>
             <a:r>
-              <a:rPr sz="3400"/>
-              <a:t>この論文がやったこと</a:t>
+              <a:rPr sz="4000"/>
+              <a:t>背景：銀河中心のガンマ線超過</a:t>
             </a:r>
           </a:p>
         </p:txBody>
@@ -5092,29 +5626,29 @@
           <a:p>
             <a:pPr/>
             <a:r>
-              <a:rPr sz="2200"/>
-              <a:t>暗黒物質の信号が「ある」宇宙を、シミュレーションで何度も作る</a:t>
+              <a:rPr sz="3000"/>
+              <a:t>Fermi-LAT で、銀河中心に余分なガンマ線が見つかった</a:t>
             </a:r>
           </a:p>
           <a:p>
             <a:pPr/>
             <a:r>
-              <a:rPr sz="2200"/>
-              <a:t>J の誤差の扱いを変えながら、その宇宙を解析する</a:t>
+              <a:rPr sz="3000"/>
+              <a:t>暗黒物質（WIMP）の対消滅で、うまく説明できる</a:t>
+            </a:r>
+          </a:p>
+          <a:p>
+            <a:pPr lvl="1"/>
+            <a:r>
+              <a:rPr sz="2400"/>
+              <a:t>質量 35–65 GeV、⟨σv⟩ ≈ (1–3)×10⁻²⁶ cm³/s</a:t>
             </a:r>
           </a:p>
           <a:p>
             <a:pPr/>
             <a:r>
-              <a:rPr sz="2200"/>
-              <a:t>本物の信号を、間違って「無い」と判定してしまう回数を数える</a:t>
-            </a:r>
-          </a:p>
-          <a:p>
-            <a:pPr/>
-            <a:r>
-              <a:rPr sz="2200"/>
-              <a:t>対象：矮小銀河 1 個（Ursa Minor）と、27 個をまとめた解析</a:t>
+              <a:rPr sz="3000"/>
+              <a:t>ミリ秒パルサー説もあるが、否定的な材料が多い</a:t>
             </a:r>
           </a:p>
         </p:txBody>
@@ -5153,7 +5687,280 @@
           <a:lstStyle/>
           <a:p>
             <a:r>
-              <a:rPr sz="3400"/>
+              <a:rPr sz="4000"/>
+              <a:t>確認役としての矮小銀河</a:t>
+            </a:r>
+          </a:p>
+        </p:txBody>
+      </p:sp>
+      <p:sp>
+        <p:nvSpPr>
+          <p:cNvPr id="3" name="Content Placeholder 2"/>
+          <p:cNvSpPr>
+            <a:spLocks noGrp="1"/>
+          </p:cNvSpPr>
+          <p:nvPr>
+            <p:ph idx="1"/>
+          </p:nvPr>
+        </p:nvSpPr>
+        <p:spPr/>
+        <p:txBody>
+          <a:bodyPr/>
+          <a:lstStyle/>
+          <a:p>
+            <a:pPr/>
+            <a:r>
+              <a:rPr sz="3000"/>
+              <a:t>本当に暗黒物質なら、矮小銀河からも来るはず</a:t>
+            </a:r>
+          </a:p>
+          <a:p>
+            <a:pPr/>
+            <a:r>
+              <a:rPr sz="3000"/>
+              <a:t>信号は銀河中心より 10³〜10⁴ 倍以上弱い</a:t>
+            </a:r>
+          </a:p>
+          <a:p>
+            <a:pPr/>
+            <a:r>
+              <a:rPr sz="3000"/>
+              <a:t>でも、ガスや星形成がほとんど無く雑音が少ない</a:t>
+            </a:r>
+          </a:p>
+          <a:p>
+            <a:pPr/>
+            <a:r>
+              <a:rPr sz="3000"/>
+              <a:t>どれくらい光るかは「J ファクター」で決まる</a:t>
+            </a:r>
+          </a:p>
+          <a:p>
+            <a:pPr lvl="1"/>
+            <a:r>
+              <a:rPr sz="2400"/>
+              <a:t>暗黒物質の密度を2乗して、視線方向に足し合わせた量</a:t>
+            </a:r>
+          </a:p>
+          <a:p>
+            <a:pPr lvl="1"/>
+            <a:r>
+              <a:rPr sz="2400"/>
+              <a:t>矮小銀河の J は、星の動きから推定するしかない</a:t>
+            </a:r>
+          </a:p>
+        </p:txBody>
+      </p:sp>
+    </p:spTree>
+  </p:cSld>
+  <p:clrMapOvr>
+    <a:masterClrMapping/>
+  </p:clrMapOvr>
+</p:sld>
+</file>
+
+<file path=ppt/slides/slide7.xml><?xml version="1.0" encoding="utf-8"?>
+<p:sld xmlns:a="http://schemas.openxmlformats.org/drawingml/2006/main" xmlns:p="http://schemas.openxmlformats.org/presentationml/2006/main" xmlns:r="http://schemas.openxmlformats.org/officeDocument/2006/relationships">
+  <p:cSld>
+    <p:spTree>
+      <p:nvGrpSpPr>
+        <p:cNvPr id="1" name=""/>
+        <p:cNvGrpSpPr/>
+        <p:nvPr/>
+      </p:nvGrpSpPr>
+      <p:grpSpPr/>
+      <p:sp>
+        <p:nvSpPr>
+          <p:cNvPr id="2" name="Title 1"/>
+          <p:cNvSpPr>
+            <a:spLocks noGrp="1"/>
+          </p:cNvSpPr>
+          <p:nvPr>
+            <p:ph type="title"/>
+          </p:nvPr>
+        </p:nvSpPr>
+        <p:spPr/>
+        <p:txBody>
+          <a:bodyPr/>
+          <a:lstStyle/>
+          <a:p>
+            <a:r>
+              <a:rPr sz="4000"/>
+              <a:t>この論文の問題意識</a:t>
+            </a:r>
+          </a:p>
+        </p:txBody>
+      </p:sp>
+      <p:sp>
+        <p:nvSpPr>
+          <p:cNvPr id="3" name="Content Placeholder 2"/>
+          <p:cNvSpPr>
+            <a:spLocks noGrp="1"/>
+          </p:cNvSpPr>
+          <p:nvPr>
+            <p:ph idx="1"/>
+          </p:nvPr>
+        </p:nvSpPr>
+        <p:spPr/>
+        <p:txBody>
+          <a:bodyPr/>
+          <a:lstStyle/>
+          <a:p>
+            <a:pPr/>
+            <a:r>
+              <a:rPr sz="3000"/>
+              <a:t>矮小銀河の J の誤差は、小さく見積もられている</a:t>
+            </a:r>
+          </a:p>
+          <a:p>
+            <a:pPr/>
+            <a:r>
+              <a:rPr sz="3000"/>
+              <a:t>見落とされがちな誤差の原因</a:t>
+            </a:r>
+          </a:p>
+          <a:p>
+            <a:pPr lvl="1"/>
+            <a:r>
+              <a:rPr sz="2400"/>
+              <a:t>星の所属判定 ／ 見分けられていない連星</a:t>
+            </a:r>
+          </a:p>
+          <a:p>
+            <a:pPr lvl="1"/>
+            <a:r>
+              <a:rPr sz="2400"/>
+              <a:t>釣り合い・球対称からのズレ ／ 密度分布の形の仮定</a:t>
+            </a:r>
+          </a:p>
+          <a:p>
+            <a:pPr/>
+            <a:r>
+              <a:rPr sz="3000"/>
+              <a:t>Δlog₁₀J ≈ 0.5（約 3 倍）の誤差は見込むべき</a:t>
+            </a:r>
+          </a:p>
+        </p:txBody>
+      </p:sp>
+    </p:spTree>
+  </p:cSld>
+  <p:clrMapOvr>
+    <a:masterClrMapping/>
+  </p:clrMapOvr>
+</p:sld>
+</file>
+
+<file path=ppt/slides/slide8.xml><?xml version="1.0" encoding="utf-8"?>
+<p:sld xmlns:a="http://schemas.openxmlformats.org/drawingml/2006/main" xmlns:p="http://schemas.openxmlformats.org/presentationml/2006/main" xmlns:r="http://schemas.openxmlformats.org/officeDocument/2006/relationships">
+  <p:cSld>
+    <p:spTree>
+      <p:nvGrpSpPr>
+        <p:cNvPr id="1" name=""/>
+        <p:cNvGrpSpPr/>
+        <p:nvPr/>
+      </p:nvGrpSpPr>
+      <p:grpSpPr/>
+      <p:sp>
+        <p:nvSpPr>
+          <p:cNvPr id="2" name="Title 1"/>
+          <p:cNvSpPr>
+            <a:spLocks noGrp="1"/>
+          </p:cNvSpPr>
+          <p:nvPr>
+            <p:ph type="title"/>
+          </p:nvPr>
+        </p:nvSpPr>
+        <p:spPr/>
+        <p:txBody>
+          <a:bodyPr/>
+          <a:lstStyle/>
+          <a:p>
+            <a:r>
+              <a:rPr sz="4000"/>
+              <a:t>この論文がやったこと</a:t>
+            </a:r>
+          </a:p>
+        </p:txBody>
+      </p:sp>
+      <p:sp>
+        <p:nvSpPr>
+          <p:cNvPr id="3" name="Content Placeholder 2"/>
+          <p:cNvSpPr>
+            <a:spLocks noGrp="1"/>
+          </p:cNvSpPr>
+          <p:nvPr>
+            <p:ph idx="1"/>
+          </p:nvPr>
+        </p:nvSpPr>
+        <p:spPr/>
+        <p:txBody>
+          <a:bodyPr/>
+          <a:lstStyle/>
+          <a:p>
+            <a:pPr/>
+            <a:r>
+              <a:rPr sz="3000"/>
+              <a:t>暗黒物質の信号が「ある」宇宙を、何度も作る</a:t>
+            </a:r>
+          </a:p>
+          <a:p>
+            <a:pPr/>
+            <a:r>
+              <a:rPr sz="3000"/>
+              <a:t>J の誤差の扱いを変えながら、解析する</a:t>
+            </a:r>
+          </a:p>
+          <a:p>
+            <a:pPr/>
+            <a:r>
+              <a:rPr sz="3000"/>
+              <a:t>本物を「無い」と間違えた回数を数える</a:t>
+            </a:r>
+          </a:p>
+          <a:p>
+            <a:pPr/>
+            <a:r>
+              <a:rPr sz="3000"/>
+              <a:t>対象：Ursa Minor 1 個と、27 個まとめた解析</a:t>
+            </a:r>
+          </a:p>
+        </p:txBody>
+      </p:sp>
+    </p:spTree>
+  </p:cSld>
+  <p:clrMapOvr>
+    <a:masterClrMapping/>
+  </p:clrMapOvr>
+</p:sld>
+</file>
+
+<file path=ppt/slides/slide9.xml><?xml version="1.0" encoding="utf-8"?>
+<p:sld xmlns:a="http://schemas.openxmlformats.org/drawingml/2006/main" xmlns:p="http://schemas.openxmlformats.org/presentationml/2006/main" xmlns:r="http://schemas.openxmlformats.org/officeDocument/2006/relationships">
+  <p:cSld>
+    <p:spTree>
+      <p:nvGrpSpPr>
+        <p:cNvPr id="1" name=""/>
+        <p:cNvGrpSpPr/>
+        <p:nvPr/>
+      </p:nvGrpSpPr>
+      <p:grpSpPr/>
+      <p:sp>
+        <p:nvSpPr>
+          <p:cNvPr id="2" name="Title 1"/>
+          <p:cNvSpPr>
+            <a:spLocks noGrp="1"/>
+          </p:cNvSpPr>
+          <p:nvPr>
+            <p:ph type="title"/>
+          </p:nvPr>
+        </p:nvSpPr>
+        <p:spPr/>
+        <p:txBody>
+          <a:bodyPr/>
+          <a:lstStyle/>
+          <a:p>
+            <a:r>
+              <a:rPr sz="4000"/>
               <a:t>2つの「誤差」：σ と σ_L</a:t>
             </a:r>
           </a:p>
@@ -5180,29 +5987,29 @@
           <a:p>
             <a:pPr/>
             <a:r>
+              <a:rPr sz="2600"/>
+              <a:t>σ：J の本当のブレ</a:t>
+            </a:r>
+          </a:p>
+          <a:p>
+            <a:pPr/>
+            <a:r>
+              <a:rPr sz="2600"/>
+              <a:t>σ_L：ソフトに伝えるブレ</a:t>
+            </a:r>
+          </a:p>
+          <a:p>
+            <a:pPr/>
+            <a:r>
+              <a:rPr sz="2600"/>
+              <a:t>σ_L が小さい ＝ ソフトが自信満々</a:t>
+            </a:r>
+          </a:p>
+          <a:p>
+            <a:pPr lvl="1"/>
+            <a:r>
               <a:rPr sz="2000"/>
-              <a:t>σ：J の本当のブレ</a:t>
-            </a:r>
-          </a:p>
-          <a:p>
-            <a:pPr/>
-            <a:r>
-              <a:rPr sz="2000"/>
-              <a:t>σ_L：解析ソフトに伝えるブレ</a:t>
-            </a:r>
-          </a:p>
-          <a:p>
-            <a:pPr/>
-            <a:r>
-              <a:rPr sz="2000"/>
-              <a:t>σ_L が小さすぎる = ソフトが自信満々</a:t>
-            </a:r>
-          </a:p>
-          <a:p>
-            <a:pPr lvl="1"/>
-            <a:r>
-              <a:rPr sz="1700"/>
-              <a:t>「こんなに光るはずなのに見えない、だから暗黒物質は無い」と言い切ってしまう</a:t>
+              <a:t>「見えないから暗黒物質は無い」と言い切ってしまう</a:t>
             </a:r>
           </a:p>
         </p:txBody>
@@ -5231,279 +6038,6 @@
           </a:prstGeom>
         </p:spPr>
       </p:pic>
-    </p:spTree>
-  </p:cSld>
-  <p:clrMapOvr>
-    <a:masterClrMapping/>
-  </p:clrMapOvr>
-</p:sld>
-</file>
-
-<file path=ppt/slides/slide7.xml><?xml version="1.0" encoding="utf-8"?>
-<p:sld xmlns:a="http://schemas.openxmlformats.org/drawingml/2006/main" xmlns:p="http://schemas.openxmlformats.org/presentationml/2006/main" xmlns:r="http://schemas.openxmlformats.org/officeDocument/2006/relationships">
-  <p:cSld>
-    <p:spTree>
-      <p:nvGrpSpPr>
-        <p:cNvPr id="1" name=""/>
-        <p:cNvGrpSpPr/>
-        <p:nvPr/>
-      </p:nvGrpSpPr>
-      <p:grpSpPr/>
-      <p:sp>
-        <p:nvSpPr>
-          <p:cNvPr id="2" name="Title 1"/>
-          <p:cNvSpPr>
-            <a:spLocks noGrp="1"/>
-          </p:cNvSpPr>
-          <p:nvPr>
-            <p:ph type="title"/>
-          </p:nvPr>
-        </p:nvSpPr>
-        <p:spPr/>
-        <p:txBody>
-          <a:bodyPr/>
-          <a:lstStyle/>
-          <a:p>
-            <a:r>
-              <a:rPr sz="3400"/>
-              <a:t>わかったこと①：誤差を正直に広げると</a:t>
-            </a:r>
-          </a:p>
-        </p:txBody>
-      </p:sp>
-      <p:sp>
-        <p:nvSpPr>
-          <p:cNvPr id="3" name="Content Placeholder 2"/>
-          <p:cNvSpPr>
-            <a:spLocks noGrp="1"/>
-          </p:cNvSpPr>
-          <p:nvPr>
-            <p:ph idx="1"/>
-          </p:nvPr>
-        </p:nvSpPr>
-        <p:spPr/>
-        <p:txBody>
-          <a:bodyPr/>
-          <a:lstStyle/>
-          <a:p>
-            <a:pPr/>
-            <a:r>
-              <a:rPr sz="2200"/>
-              <a:t>上限がゆるくなる（暗黒物質を否定する力が弱くなる）</a:t>
-            </a:r>
-          </a:p>
-          <a:p>
-            <a:pPr/>
-            <a:r>
-              <a:rPr sz="2200"/>
-              <a:t>矮小銀河 1 個（Ursa Minor）</a:t>
-            </a:r>
-          </a:p>
-          <a:p>
-            <a:pPr lvl="1"/>
-            <a:r>
-              <a:rPr sz="1900"/>
-              <a:t>誤差を 0.3 / 0.5 / 1.0 足すと、上限が 1.5 / 2.5 / 11 倍ゆるくなる</a:t>
-            </a:r>
-          </a:p>
-          <a:p>
-            <a:pPr/>
-            <a:r>
-              <a:rPr sz="2200"/>
-              <a:t>27 個をまとめた解析</a:t>
-            </a:r>
-          </a:p>
-          <a:p>
-            <a:pPr lvl="1"/>
-            <a:r>
-              <a:rPr sz="1900"/>
-              <a:t>誤差を 0.5 / 1.0 足すと、上限が 1.4 / 3.2 倍ゆるくなる</a:t>
-            </a:r>
-          </a:p>
-        </p:txBody>
-      </p:sp>
-    </p:spTree>
-  </p:cSld>
-  <p:clrMapOvr>
-    <a:masterClrMapping/>
-  </p:clrMapOvr>
-</p:sld>
-</file>
-
-<file path=ppt/slides/slide8.xml><?xml version="1.0" encoding="utf-8"?>
-<p:sld xmlns:a="http://schemas.openxmlformats.org/drawingml/2006/main" xmlns:p="http://schemas.openxmlformats.org/presentationml/2006/main" xmlns:r="http://schemas.openxmlformats.org/officeDocument/2006/relationships">
-  <p:cSld>
-    <p:spTree>
-      <p:nvGrpSpPr>
-        <p:cNvPr id="1" name=""/>
-        <p:cNvGrpSpPr/>
-        <p:nvPr/>
-      </p:nvGrpSpPr>
-      <p:grpSpPr/>
-      <p:sp>
-        <p:nvSpPr>
-          <p:cNvPr id="2" name="Title 1"/>
-          <p:cNvSpPr>
-            <a:spLocks noGrp="1"/>
-          </p:cNvSpPr>
-          <p:nvPr>
-            <p:ph type="title"/>
-          </p:nvPr>
-        </p:nvSpPr>
-        <p:spPr/>
-        <p:txBody>
-          <a:bodyPr/>
-          <a:lstStyle/>
-          <a:p>
-            <a:r>
-              <a:rPr sz="3400"/>
-              <a:t>わかったこと②：誤差を小さく見積もると</a:t>
-            </a:r>
-          </a:p>
-        </p:txBody>
-      </p:sp>
-      <p:sp>
-        <p:nvSpPr>
-          <p:cNvPr id="3" name="Content Placeholder 2"/>
-          <p:cNvSpPr>
-            <a:spLocks noGrp="1"/>
-          </p:cNvSpPr>
-          <p:nvPr>
-            <p:ph idx="1"/>
-          </p:nvPr>
-        </p:nvSpPr>
-        <p:spPr/>
-        <p:txBody>
-          <a:bodyPr/>
-          <a:lstStyle/>
-          <a:p>
-            <a:pPr/>
-            <a:r>
-              <a:rPr sz="2200"/>
-              <a:t>本物の信号を、間違って「無い」と判定しやすくなる</a:t>
-            </a:r>
-          </a:p>
-          <a:p>
-            <a:pPr/>
-            <a:r>
-              <a:rPr sz="2200"/>
-              <a:t>27 個をまとめた解析では特にひどい</a:t>
-            </a:r>
-          </a:p>
-          <a:p>
-            <a:pPr lvl="1"/>
-            <a:r>
-              <a:rPr sz="1900"/>
-              <a:t>ふつうの設定でも、5% をはるかに超える頻度で本物を除外</a:t>
-            </a:r>
-          </a:p>
-          <a:p>
-            <a:pPr lvl="1"/>
-            <a:r>
-              <a:rPr sz="1900"/>
-              <a:t>誤差を正しく合わせても、完全には直らない</a:t>
-            </a:r>
-          </a:p>
-          <a:p>
-            <a:pPr/>
-            <a:r>
-              <a:rPr sz="2200"/>
-              <a:t>論文のおすすめ：空の領域（blank field）などで実際に試して較正する</a:t>
-            </a:r>
-          </a:p>
-        </p:txBody>
-      </p:sp>
-    </p:spTree>
-  </p:cSld>
-  <p:clrMapOvr>
-    <a:masterClrMapping/>
-  </p:clrMapOvr>
-</p:sld>
-</file>
-
-<file path=ppt/slides/slide9.xml><?xml version="1.0" encoding="utf-8"?>
-<p:sld xmlns:a="http://schemas.openxmlformats.org/drawingml/2006/main" xmlns:p="http://schemas.openxmlformats.org/presentationml/2006/main" xmlns:r="http://schemas.openxmlformats.org/officeDocument/2006/relationships">
-  <p:cSld>
-    <p:spTree>
-      <p:nvGrpSpPr>
-        <p:cNvPr id="1" name=""/>
-        <p:cNvGrpSpPr/>
-        <p:nvPr/>
-      </p:nvGrpSpPr>
-      <p:grpSpPr/>
-      <p:sp>
-        <p:nvSpPr>
-          <p:cNvPr id="2" name="Title 1"/>
-          <p:cNvSpPr>
-            <a:spLocks noGrp="1"/>
-          </p:cNvSpPr>
-          <p:nvPr>
-            <p:ph type="title"/>
-          </p:nvPr>
-        </p:nvSpPr>
-        <p:spPr/>
-        <p:txBody>
-          <a:bodyPr/>
-          <a:lstStyle/>
-          <a:p>
-            <a:r>
-              <a:rPr sz="3400"/>
-              <a:t>わかったこと③：ハローの形を間違えると</a:t>
-            </a:r>
-          </a:p>
-        </p:txBody>
-      </p:sp>
-      <p:sp>
-        <p:nvSpPr>
-          <p:cNvPr id="3" name="Content Placeholder 2"/>
-          <p:cNvSpPr>
-            <a:spLocks noGrp="1"/>
-          </p:cNvSpPr>
-          <p:nvPr>
-            <p:ph idx="1"/>
-          </p:nvPr>
-        </p:nvSpPr>
-        <p:spPr/>
-        <p:txBody>
-          <a:bodyPr/>
-          <a:lstStyle/>
-          <a:p>
-            <a:pPr/>
-            <a:r>
-              <a:rPr sz="2200"/>
-              <a:t>上限が厳しく出すぎる</a:t>
-            </a:r>
-          </a:p>
-          <a:p>
-            <a:pPr/>
-            <a:r>
-              <a:rPr sz="2200"/>
-              <a:t>Ursa Minor の場合</a:t>
-            </a:r>
-          </a:p>
-          <a:p>
-            <a:pPr lvl="1"/>
-            <a:r>
-              <a:rPr sz="1900"/>
-              <a:t>形を間違える（球対称の NFW で解析）→ 2.4 倍</a:t>
-            </a:r>
-          </a:p>
-          <a:p>
-            <a:pPr lvl="1"/>
-            <a:r>
-              <a:rPr sz="1900"/>
-              <a:t>広がりを無視する（点として解析）→ 1.4 倍</a:t>
-            </a:r>
-          </a:p>
-          <a:p>
-            <a:pPr/>
-            <a:r>
-              <a:rPr sz="2200"/>
-              <a:t>27 個全部を点として扱うと、本物を除外する割合が大きく増える</a:t>
-            </a:r>
-          </a:p>
-        </p:txBody>
-      </p:sp>
     </p:spTree>
   </p:cSld>
   <p:clrMapOvr>

--- a/slides/Toni Bertólez-Martínez, et al. (2026).pptx
+++ b/slides/Toni Bertólez-Martínez, et al. (2026).pptx
@@ -531,7 +531,7 @@
           <a:lstStyle/>
           <a:p>
             <a:r>
-              <a:t>数字は docs/verification/verdict.md と docs/HANDOFF.md から。</a:t>
+              <a:t>数字は .dev/HANDOFF.md、判定記録 (.dev/teams/regionac-dwarf-verification/verdict.md)、cloud_reports/2026-10-01_*.md から。</a:t>
             </a:r>
           </a:p>
           <a:p>
@@ -541,22 +541,27 @@
           </a:p>
           <a:p>
             <a:r>
-              <a:t>縮退 = 2つの成分の形が似ていて、フィットでどちらに割り振っても同じくらい合ってしまう状態。</a:t>
-            </a:r>
-          </a:p>
-          <a:p>
-            <a:r>
-              <a:t>同じ面積を経度方向にずらして外しても ICS は 0.46–0.79 のまま。本物のバブル位置を外したときだけ 1.025 に戻る → ICS のズレはバブル/銀河中心方向に集中している。これが今回の一番確かな成果。</a:t>
-            </a:r>
-          </a:p>
-          <a:p>
-            <a:r>
-              <a:t>Totani の報告は 13–19σ。19.1σ は名目値なので「19σ だから確実」とは言わない。</a:t>
-            </a:r>
-          </a:p>
-          <a:p>
-            <a:r>
-              <a:t>(聞かれたら) バブル除外で Bin6 は 19.0σ → 4.96σ。同面積を経度方向にずらすと 13.4–16.3σ なのでバブル固有。ただし低下の過半はデータが減ったせいで、バブル固有分は約 37%。</a:t>
+              <a:t>縮退 = 2つの成分の形が似ていて、フィットでどちらに割り振っても同じくらい合ってしまう状態。たとえ: 部屋の電球 (ICS) ともう1つの光 (ハロー) が写真でほぼ同じ形に見える。</a:t>
+            </a:r>
+          </a:p>
+          <a:p>
+            <a:r>
+              <a:t>19.0σ は 2026-10-01 の再計算 (v20r、コードと設定の記録付き)。Totani の報告は 13–19σ。名目値なので「19σ だから確実」とは言わない。</a:t>
+            </a:r>
+          </a:p>
+          <a:p>
+            <a:r>
+              <a:t>バブル除外の低下は、ハローを見分ける手がかりの偏り (フィッシャー情報) だけで予測 6.4σ、実測 5.0σ。同じ面積を経度方向にずらした対照でも予測と実測は合う。バブルの内と外でハローの明るさの差は 1.5σ で、意味のある差は無い。</a:t>
+            </a:r>
+          </a:p>
+          <a:p>
+            <a:r>
+              <a:t>ICS の計算の等方近似は原因ではない: 非等方にしても ICS は 1.1〜1.3 倍で、外側のほうが少し大きい (Moskalenko &amp; Strong 2000)。</a:t>
+            </a:r>
+          </a:p>
+          <a:p>
+            <a:r>
+              <a:t>残る疑問: GALPROP の ICS の形が、バブル領域で 2.3 倍もずれているか。今の道具では確かめられない。</a:t>
             </a:r>
           </a:p>
         </p:txBody>
@@ -856,7 +861,7 @@
           <a:lstStyle/>
           <a:p>
             <a:r>
-              <a:t>数字は docs/verification/verdict.md と docs/HANDOFF.md から。</a:t>
+              <a:t>数字は .dev/HANDOFF.md と .dev/teams/regionac-dwarf-verification/verdict.md から。</a:t>
             </a:r>
           </a:p>
           <a:p>
@@ -951,7 +956,7 @@
           </a:p>
           <a:p>
             <a:r>
-              <a:t>ただし天の川側の密度 (ρ_s) の仮定が2乗で効くので、予測は 1.35–5.4σ という幅になる。実測 −0.18σ と強く矛盾するとは言えない (verdict.md の C3)。</a:t>
+              <a:t>ただし天の川側の密度 (ρ_s) の仮定が2乗で効くので、予測は 1.35–5.4σ という幅になる。実測 −0.18σ と強く矛盾するとは言えない (判定記録 (verdict.md) の C3)。</a:t>
             </a:r>
           </a:p>
           <a:p>
@@ -5270,7 +5275,7 @@
             <a:pPr lvl="1"/>
             <a:r>
               <a:rPr sz="2400"/>
-              <a:t>19.1σ は名目値。「19σ だから確実」とは言えない</a:t>
+              <a:t>19.0σ は名目値。「19σ だから確実」とは言えない</a:t>
             </a:r>
           </a:p>
           <a:p>
@@ -5354,42 +5359,42 @@
             <a:pPr/>
             <a:r>
               <a:rPr sz="3000"/>
-              <a:t>Totani の 20 GeV ハローを再現（Bin6 で 19.1σ）</a:t>
+              <a:t>Totani の 20 GeV ハローを再現（Bin6 で 19.0σ）</a:t>
             </a:r>
           </a:p>
           <a:p>
             <a:pPr/>
             <a:r>
               <a:rPr sz="3000"/>
-              <a:t>既知のガンマ線を引いて、残りをハローとみなす</a:t>
+              <a:t>ICS とハローは、空での形がよく似ている（縮退）</a:t>
+            </a:r>
+          </a:p>
+          <a:p>
+            <a:pPr lvl="1"/>
+            <a:r>
+              <a:rPr sz="2400"/>
+              <a:t>違いは「銀河中心の方向に集まっているか」だけ</a:t>
             </a:r>
           </a:p>
           <a:p>
             <a:pPr/>
             <a:r>
               <a:rPr sz="3000"/>
-              <a:t>ICS とハローは、空での形がよく似ている</a:t>
+              <a:t>バブル領域を外すと 19.0σ → 5.0σ に下がる</a:t>
             </a:r>
           </a:p>
           <a:p>
             <a:pPr lvl="1"/>
             <a:r>
               <a:rPr sz="2400"/>
-              <a:t>片方の分を、もう片方が肩代わりできる（縮退）</a:t>
+              <a:t>手がかりがそこに集まっているため。汚染の証拠ではない</a:t>
             </a:r>
           </a:p>
           <a:p>
             <a:pPr/>
             <a:r>
               <a:rPr sz="3000"/>
-              <a:t>バブル領域を外したときだけ、ICS が正常に戻った</a:t>
-            </a:r>
-          </a:p>
-          <a:p>
-            <a:pPr lvl="1"/>
-            <a:r>
-              <a:rPr sz="2400"/>
-              <a:t>ICS の強さ：外さない 0.605 → 外す 1.025（本来は約 1）</a:t>
+              <a:t>ハローが偽物なら、ICS がバブル領域で約 2.3 倍明るい必要がある</a:t>
             </a:r>
           </a:p>
         </p:txBody>

--- a/slides/Toni Bertólez-Martínez, et al. (2026).pptx
+++ b/slides/Toni Bertólez-Martínez, et al. (2026).pptx
@@ -866,7 +866,7 @@
           </a:p>
           <a:p>
             <a:r>
-              <a:t>較正は 2026-07-31 に実施。空の領域では平均 −0.021、標準偏差 1.362、最大 4.50σ、|σ|&gt;3 が 2.4% (理論なら 0.27%)。</a:t>
+              <a:t>較正は 2026-07-31 に実施。何も無い対照領域 23 か所 (250 個の有意度) では平均 −0.021、標準偏差 1.362、最大 4.50σ、|σ|&gt;3 が 2.4% (理論なら 0.27%)。</a:t>
             </a:r>
           </a:p>
           <a:p>
@@ -5268,7 +5268,7 @@
             <a:pPr lvl="1"/>
             <a:r>
               <a:rPr sz="2400"/>
-              <a:t>空の領域 833 か所で、σ のばらつきは 1 ではなく 1.362</a:t>
+              <a:t>何も無い空の領域 23 か所で、σ のばらつきは 1 ではなく 1.362</a:t>
             </a:r>
           </a:p>
           <a:p>
